--- a/cs701/slides/week-03.pptx
+++ b/cs701/slides/week-03.pptx
@@ -6272,7 +6272,7 @@
                   <a:srgbClr val="01AEFD"/>
                 </a:solidFill>
               </a:rPr>
-              <a:t>Type this into LegalAge.java   -   line 1</a:t>
+              <a:t>Make a new file, LegalAge.java, and type this in   -   line 1</a:t>
             </a:r>
           </a:p>
         </p:txBody>
@@ -6543,7 +6543,7 @@
                   <a:srgbClr val="DCECEF"/>
                 </a:solidFill>
               </a:rPr>
-              <a:t>Opens the class. Its name must be the file's name without .java - LegalAge lives in LegalAge.java - and every other line goes inside its braces.</a:t>
+              <a:t>Opens the class: LegalAge, the file's name without .java.</a:t>
             </a:r>
           </a:p>
         </p:txBody>
@@ -7917,7 +7917,7 @@
                   <a:srgbClr val="01AEFD"/>
                 </a:solidFill>
               </a:rPr>
-              <a:t>Type this into Scores.java   -   line 1</a:t>
+              <a:t>Make a new file, Scores.java, and type this in   -   line 1</a:t>
             </a:r>
           </a:p>
         </p:txBody>
@@ -7998,7 +7998,7 @@
                   <a:srgbClr val="DCECEF"/>
                 </a:solidFill>
               </a:rPr>
-              <a:t>Opens the class. Its name must be the file's name without .java - Scores lives in Scores.java - and every other line goes inside its braces.</a:t>
+              <a:t>Opens the class: Scores, the file's name without .java.</a:t>
             </a:r>
           </a:p>
         </p:txBody>
@@ -15027,7 +15027,7 @@
                   <a:srgbClr val="01AEFD"/>
                 </a:solidFill>
               </a:rPr>
-              <a:t>Type this into StudentGrading.java   -   line 1</a:t>
+              <a:t>Make a new file, StudentGrading.java, and type this in   -   line 1</a:t>
             </a:r>
           </a:p>
         </p:txBody>
@@ -15298,7 +15298,7 @@
                   <a:srgbClr val="DCECEF"/>
                 </a:solidFill>
               </a:rPr>
-              <a:t>Opens the class. Its name must be the file's name without .java - StudentGrading lives in StudentGrading.java - and every other line goes inside its braces.</a:t>
+              <a:t>Opens the class: StudentGrading, the file's name without .java.</a:t>
             </a:r>
           </a:p>
         </p:txBody>
@@ -19869,7 +19869,7 @@
                   <a:srgbClr val="01AEFD"/>
                 </a:solidFill>
               </a:rPr>
-              <a:t>Type this into Registration.java   -   line 1</a:t>
+              <a:t>Make a new file, Registration.java, and type this in   -   line 1</a:t>
             </a:r>
           </a:p>
         </p:txBody>
@@ -20480,7 +20480,7 @@
                   <a:srgbClr val="DCECEF"/>
                 </a:solidFill>
               </a:rPr>
-              <a:t>Opens the class. Its name must be the file's name without .java - Registration lives in Registration.java - and every other line goes inside its braces.</a:t>
+              <a:t>Opens the class: Registration, the file's name without .java.</a:t>
             </a:r>
           </a:p>
         </p:txBody>
